--- a/docoments/Fursad.pptx
+++ b/docoments/Fursad.pptx
@@ -129,6 +129,18 @@
 </p:presentation>
 </file>
 
+<file path=ppt/commentAuthors.xml><?xml version="1.0" encoding="utf-8"?>
+<p:cmAuthorLst xmlns:a="http://schemas.openxmlformats.org/drawingml/2006/main" xmlns:r="http://schemas.openxmlformats.org/officeDocument/2006/relationships" xmlns:p="http://schemas.openxmlformats.org/presentationml/2006/main">
+  <p:cmAuthor id="1" name="Microsoft account" initials="Ma" lastIdx="3" clrIdx="0">
+    <p:extLst>
+      <p:ext uri="{19B8F6BF-5375-455C-9EA6-DF929625EA0E}">
+        <p15:presenceInfo xmlns:p15="http://schemas.microsoft.com/office/powerpoint/2012/main" userId="646ffc8951fc44a5" providerId="Windows Live"/>
+      </p:ext>
+    </p:extLst>
+  </p:cmAuthor>
+</p:cmAuthorLst>
+</file>
+
 <file path=ppt/charts/chart1.xml><?xml version="1.0" encoding="utf-8"?>
 <c:chartSpace xmlns:c="http://schemas.openxmlformats.org/drawingml/2006/chart" xmlns:a="http://schemas.openxmlformats.org/drawingml/2006/main" xmlns:r="http://schemas.openxmlformats.org/officeDocument/2006/relationships">
   <c:date1904 val="0"/>
@@ -146,21 +158,16 @@
               <a:defRPr/>
             </a:pPr>
             <a:r>
-              <a:rPr lang="en-US" dirty="0"/>
-              <a:t>Test </a:t>
-            </a:r>
-            <a:r>
               <a:rPr lang="en-US" dirty="0">
                 <a:solidFill>
                   <a:srgbClr val="FF0000"/>
                 </a:solidFill>
               </a:rPr>
-              <a:t>Results</a:t>
+              <a:t>Test Results</a:t>
             </a:r>
           </a:p>
         </c:rich>
       </c:tx>
-      <c:layout/>
       <c:overlay val="0"/>
     </c:title>
     <c:autoTitleDeleted val="0"/>
@@ -224,7 +231,6 @@
             <c:showLeaderLines val="0"/>
             <c:extLst>
               <c:ext xmlns:c15="http://schemas.microsoft.com/office/drawing/2012/chart" uri="{CE6537A1-D6FC-4f65-9D91-7224C49458BB}">
-                <c15:layout/>
                 <c15:showLeaderLines val="0"/>
               </c:ext>
             </c:extLst>
@@ -297,11 +303,11 @@
           <c:showBubbleSize val="0"/>
         </c:dLbls>
         <c:gapWidth val="150"/>
-        <c:axId val="2131052784"/>
-        <c:axId val="2131051696"/>
+        <c:axId val="-626154160"/>
+        <c:axId val="-909953248"/>
       </c:barChart>
       <c:catAx>
-        <c:axId val="2131052784"/>
+        <c:axId val="-626154160"/>
         <c:scaling>
           <c:orientation val="minMax"/>
         </c:scaling>
@@ -335,7 +341,7 @@
             <a:endParaRPr lang="en-US"/>
           </a:p>
         </c:txPr>
-        <c:crossAx val="2131051696"/>
+        <c:crossAx val="-909953248"/>
         <c:crosses val="autoZero"/>
         <c:auto val="1"/>
         <c:lblAlgn val="ctr"/>
@@ -343,7 +349,7 @@
         <c:noMultiLvlLbl val="1"/>
       </c:catAx>
       <c:valAx>
-        <c:axId val="2131051696"/>
+        <c:axId val="-909953248"/>
         <c:scaling>
           <c:orientation val="minMax"/>
         </c:scaling>
@@ -388,7 +394,7 @@
             <a:endParaRPr lang="en-US"/>
           </a:p>
         </c:txPr>
-        <c:crossAx val="2131052784"/>
+        <c:crossAx val="-626154160"/>
         <c:crosses val="autoZero"/>
         <c:crossBetween val="between"/>
       </c:valAx>
@@ -593,11 +599,11 @@
         </c:dLbls>
         <c:gapWidth val="50"/>
         <c:overlap val="100"/>
-        <c:axId val="2131049520"/>
-        <c:axId val="2131047344"/>
+        <c:axId val="-317999808"/>
+        <c:axId val="-317994368"/>
       </c:barChart>
       <c:catAx>
-        <c:axId val="2131049520"/>
+        <c:axId val="-317999808"/>
         <c:scaling>
           <c:orientation val="minMax"/>
         </c:scaling>
@@ -631,7 +637,7 @@
             <a:endParaRPr lang="en-US"/>
           </a:p>
         </c:txPr>
-        <c:crossAx val="2131047344"/>
+        <c:crossAx val="-317994368"/>
         <c:crosses val="autoZero"/>
         <c:auto val="1"/>
         <c:lblAlgn val="ctr"/>
@@ -639,7 +645,7 @@
         <c:noMultiLvlLbl val="1"/>
       </c:catAx>
       <c:valAx>
-        <c:axId val="2131047344"/>
+        <c:axId val="-317994368"/>
         <c:scaling>
           <c:orientation val="minMax"/>
           <c:max val="100"/>
@@ -686,7 +692,7 @@
             <a:endParaRPr lang="en-US"/>
           </a:p>
         </c:txPr>
-        <c:crossAx val="2131049520"/>
+        <c:crossAx val="-317999808"/>
         <c:crosses val="autoZero"/>
         <c:crossBetween val="between"/>
       </c:valAx>
@@ -700,7 +706,6 @@
     </c:plotArea>
     <c:legend>
       <c:legendPos val="b"/>
-      <c:layout/>
       <c:overlay val="0"/>
     </c:legend>
     <c:plotVisOnly val="1"/>
@@ -720,6 +725,20 @@
     <c:autoUpdate val="0"/>
   </c:externalData>
 </c:chartSpace>
+</file>
+
+<file path=ppt/comments/comment1.xml><?xml version="1.0" encoding="utf-8"?>
+<p:cmLst xmlns:a="http://schemas.openxmlformats.org/drawingml/2006/main" xmlns:r="http://schemas.openxmlformats.org/officeDocument/2006/relationships" xmlns:p="http://schemas.openxmlformats.org/presentationml/2006/main">
+  <p:cm authorId="1" dt="2026-06-11T05:51:37.712" idx="3">
+    <p:pos x="10" y="10"/>
+    <p:text>auth_user = admin</p:text>
+    <p:extLst>
+      <p:ext uri="{C676402C-5697-4E1C-873F-D02D1690AC5C}">
+        <p15:threadingInfo xmlns:p15="http://schemas.microsoft.com/office/powerpoint/2012/main" timeZoneBias="-180"/>
+      </p:ext>
+    </p:extLst>
+  </p:cm>
+</p:cmLst>
 </file>
 
 <file path=ppt/notesMasters/notesMaster1.xml><?xml version="1.0" encoding="utf-8"?>
@@ -3202,11 +3221,27 @@
             <a:srgbClr val="1E5FAD"/>
           </a:solidFill>
           <a:ln w="12700">
-            <a:solidFill>
-              <a:srgbClr val="00B4D8"/>
-            </a:solidFill>
+            <a:noFill/>
             <a:prstDash val="solid"/>
           </a:ln>
+          <a:effectLst>
+            <a:outerShdw blurRad="44450" dist="27940" dir="5400000" algn="ctr">
+              <a:srgbClr val="000000">
+                <a:alpha val="32000"/>
+              </a:srgbClr>
+            </a:outerShdw>
+          </a:effectLst>
+          <a:scene3d>
+            <a:camera prst="orthographicFront">
+              <a:rot lat="0" lon="0" rev="0"/>
+            </a:camera>
+            <a:lightRig rig="balanced" dir="t">
+              <a:rot lat="0" lon="0" rev="8700000"/>
+            </a:lightRig>
+          </a:scene3d>
+          <a:sp3d>
+            <a:bevelT w="190500" h="38100"/>
+          </a:sp3d>
         </p:spPr>
       </p:sp>
       <p:sp>
@@ -4968,6 +5003,31 @@
           </a:p>
         </p:txBody>
       </p:sp>
+      <p:sp>
+        <p:nvSpPr>
+          <p:cNvPr id="48" name="Shape 0"/>
+          <p:cNvSpPr/>
+          <p:nvPr/>
+        </p:nvSpPr>
+        <p:spPr>
+          <a:xfrm>
+            <a:off x="0" y="0"/>
+            <a:ext cx="164592" cy="5143500"/>
+          </a:xfrm>
+          <a:prstGeom prst="rect">
+            <a:avLst/>
+          </a:prstGeom>
+          <a:solidFill>
+            <a:srgbClr val="00B4D8"/>
+          </a:solidFill>
+          <a:ln w="12700">
+            <a:solidFill>
+              <a:srgbClr val="00B4D8"/>
+            </a:solidFill>
+            <a:prstDash val="solid"/>
+          </a:ln>
+        </p:spPr>
+      </p:sp>
     </p:spTree>
   </p:cSld>
   <p:clrMapOvr>
@@ -5941,6 +6001,31 @@
           </a:p>
         </p:txBody>
       </p:sp>
+      <p:sp>
+        <p:nvSpPr>
+          <p:cNvPr id="28" name="Shape 0"/>
+          <p:cNvSpPr/>
+          <p:nvPr/>
+        </p:nvSpPr>
+        <p:spPr>
+          <a:xfrm>
+            <a:off x="0" y="0"/>
+            <a:ext cx="164592" cy="5143500"/>
+          </a:xfrm>
+          <a:prstGeom prst="rect">
+            <a:avLst/>
+          </a:prstGeom>
+          <a:solidFill>
+            <a:srgbClr val="00B4D8"/>
+          </a:solidFill>
+          <a:ln w="12700">
+            <a:solidFill>
+              <a:srgbClr val="00B4D8"/>
+            </a:solidFill>
+            <a:prstDash val="solid"/>
+          </a:ln>
+        </p:spPr>
+      </p:sp>
     </p:spTree>
   </p:cSld>
   <p:clrMapOvr>
@@ -6729,7 +6814,7 @@
           <p:nvPr>
             <p:extLst>
               <p:ext uri="{D42A27DB-BD31-4B8C-83A1-F6EECF244321}">
-                <p14:modId xmlns:p14="http://schemas.microsoft.com/office/powerpoint/2010/main" val="1293521755"/>
+                <p14:modId xmlns:p14="http://schemas.microsoft.com/office/powerpoint/2010/main" val="602404285"/>
               </p:ext>
             </p:extLst>
           </p:nvPr>
@@ -7293,6 +7378,31 @@
             <a:endParaRPr lang="en-US" sz="900" dirty="0"/>
           </a:p>
         </p:txBody>
+      </p:sp>
+      <p:sp>
+        <p:nvSpPr>
+          <p:cNvPr id="35" name="Shape 0"/>
+          <p:cNvSpPr/>
+          <p:nvPr/>
+        </p:nvSpPr>
+        <p:spPr>
+          <a:xfrm>
+            <a:off x="0" y="0"/>
+            <a:ext cx="164592" cy="5143500"/>
+          </a:xfrm>
+          <a:prstGeom prst="rect">
+            <a:avLst/>
+          </a:prstGeom>
+          <a:solidFill>
+            <a:srgbClr val="00B4D8"/>
+          </a:solidFill>
+          <a:ln w="12700">
+            <a:solidFill>
+              <a:srgbClr val="00B4D8"/>
+            </a:solidFill>
+            <a:prstDash val="solid"/>
+          </a:ln>
+        </p:spPr>
       </p:sp>
     </p:spTree>
   </p:cSld>
@@ -9472,6 +9582,31 @@
           </a:p>
         </p:txBody>
       </p:sp>
+      <p:sp>
+        <p:nvSpPr>
+          <p:cNvPr id="7" name="Shape 0"/>
+          <p:cNvSpPr/>
+          <p:nvPr/>
+        </p:nvSpPr>
+        <p:spPr>
+          <a:xfrm>
+            <a:off x="0" y="0"/>
+            <a:ext cx="164592" cy="5143500"/>
+          </a:xfrm>
+          <a:prstGeom prst="rect">
+            <a:avLst/>
+          </a:prstGeom>
+          <a:solidFill>
+            <a:srgbClr val="00B4D8"/>
+          </a:solidFill>
+          <a:ln w="12700">
+            <a:solidFill>
+              <a:srgbClr val="00B4D8"/>
+            </a:solidFill>
+            <a:prstDash val="solid"/>
+          </a:ln>
+        </p:spPr>
+      </p:sp>
     </p:spTree>
   </p:cSld>
   <p:clrMapOvr>
@@ -10243,6 +10378,31 @@
             <a:endParaRPr lang="en-US" sz="900" dirty="0"/>
           </a:p>
         </p:txBody>
+      </p:sp>
+      <p:sp>
+        <p:nvSpPr>
+          <p:cNvPr id="20" name="Shape 0"/>
+          <p:cNvSpPr/>
+          <p:nvPr/>
+        </p:nvSpPr>
+        <p:spPr>
+          <a:xfrm>
+            <a:off x="0" y="0"/>
+            <a:ext cx="164592" cy="5143500"/>
+          </a:xfrm>
+          <a:prstGeom prst="rect">
+            <a:avLst/>
+          </a:prstGeom>
+          <a:solidFill>
+            <a:srgbClr val="00B4D8"/>
+          </a:solidFill>
+          <a:ln w="12700">
+            <a:solidFill>
+              <a:srgbClr val="00B4D8"/>
+            </a:solidFill>
+            <a:prstDash val="solid"/>
+          </a:ln>
+        </p:spPr>
       </p:sp>
     </p:spTree>
   </p:cSld>
@@ -13652,6 +13812,31 @@
           </a:p>
         </p:txBody>
       </p:sp>
+      <p:sp>
+        <p:nvSpPr>
+          <p:cNvPr id="7" name="Shape 0"/>
+          <p:cNvSpPr/>
+          <p:nvPr/>
+        </p:nvSpPr>
+        <p:spPr>
+          <a:xfrm>
+            <a:off x="0" y="0"/>
+            <a:ext cx="164592" cy="5143500"/>
+          </a:xfrm>
+          <a:prstGeom prst="rect">
+            <a:avLst/>
+          </a:prstGeom>
+          <a:solidFill>
+            <a:srgbClr val="00B4D8"/>
+          </a:solidFill>
+          <a:ln w="12700">
+            <a:solidFill>
+              <a:srgbClr val="00B4D8"/>
+            </a:solidFill>
+            <a:prstDash val="solid"/>
+          </a:ln>
+        </p:spPr>
+      </p:sp>
     </p:spTree>
   </p:cSld>
   <p:clrMapOvr>
@@ -15386,6 +15571,31 @@
           </a:p>
         </p:txBody>
       </p:sp>
+      <p:sp>
+        <p:nvSpPr>
+          <p:cNvPr id="52" name="Shape 0"/>
+          <p:cNvSpPr/>
+          <p:nvPr/>
+        </p:nvSpPr>
+        <p:spPr>
+          <a:xfrm>
+            <a:off x="0" y="0"/>
+            <a:ext cx="164592" cy="5143500"/>
+          </a:xfrm>
+          <a:prstGeom prst="rect">
+            <a:avLst/>
+          </a:prstGeom>
+          <a:solidFill>
+            <a:srgbClr val="00B4D8"/>
+          </a:solidFill>
+          <a:ln w="12700">
+            <a:solidFill>
+              <a:srgbClr val="00B4D8"/>
+            </a:solidFill>
+            <a:prstDash val="solid"/>
+          </a:ln>
+        </p:spPr>
+      </p:sp>
     </p:spTree>
   </p:cSld>
   <p:clrMapOvr>
@@ -16844,6 +17054,31 @@
             <a:endParaRPr lang="en-US" sz="850" dirty="0"/>
           </a:p>
         </p:txBody>
+      </p:sp>
+      <p:sp>
+        <p:nvSpPr>
+          <p:cNvPr id="45" name="Shape 0"/>
+          <p:cNvSpPr/>
+          <p:nvPr/>
+        </p:nvSpPr>
+        <p:spPr>
+          <a:xfrm>
+            <a:off x="0" y="0"/>
+            <a:ext cx="164592" cy="5143500"/>
+          </a:xfrm>
+          <a:prstGeom prst="rect">
+            <a:avLst/>
+          </a:prstGeom>
+          <a:solidFill>
+            <a:srgbClr val="00B4D8"/>
+          </a:solidFill>
+          <a:ln w="12700">
+            <a:solidFill>
+              <a:srgbClr val="00B4D8"/>
+            </a:solidFill>
+            <a:prstDash val="solid"/>
+          </a:ln>
+        </p:spPr>
       </p:sp>
     </p:spTree>
   </p:cSld>
@@ -18187,6 +18422,31 @@
             <a:endParaRPr lang="en-US" sz="1050" dirty="0"/>
           </a:p>
         </p:txBody>
+      </p:sp>
+      <p:sp>
+        <p:nvSpPr>
+          <p:cNvPr id="23" name="Shape 0"/>
+          <p:cNvSpPr/>
+          <p:nvPr/>
+        </p:nvSpPr>
+        <p:spPr>
+          <a:xfrm>
+            <a:off x="0" y="6096"/>
+            <a:ext cx="164592" cy="5143500"/>
+          </a:xfrm>
+          <a:prstGeom prst="rect">
+            <a:avLst/>
+          </a:prstGeom>
+          <a:solidFill>
+            <a:srgbClr val="00B4D8"/>
+          </a:solidFill>
+          <a:ln w="12700">
+            <a:solidFill>
+              <a:srgbClr val="00B4D8"/>
+            </a:solidFill>
+            <a:prstDash val="solid"/>
+          </a:ln>
+        </p:spPr>
       </p:sp>
     </p:spTree>
   </p:cSld>
@@ -19023,6 +19283,31 @@
           </a:p>
         </p:txBody>
       </p:sp>
+      <p:sp>
+        <p:nvSpPr>
+          <p:cNvPr id="24" name="Shape 0"/>
+          <p:cNvSpPr/>
+          <p:nvPr/>
+        </p:nvSpPr>
+        <p:spPr>
+          <a:xfrm>
+            <a:off x="0" y="0"/>
+            <a:ext cx="164592" cy="5143500"/>
+          </a:xfrm>
+          <a:prstGeom prst="rect">
+            <a:avLst/>
+          </a:prstGeom>
+          <a:solidFill>
+            <a:srgbClr val="00B4D8"/>
+          </a:solidFill>
+          <a:ln w="12700">
+            <a:solidFill>
+              <a:srgbClr val="00B4D8"/>
+            </a:solidFill>
+            <a:prstDash val="solid"/>
+          </a:ln>
+        </p:spPr>
+      </p:sp>
     </p:spTree>
   </p:cSld>
   <p:clrMapOvr>
@@ -20976,6 +21261,31 @@
           </a:p>
         </p:txBody>
       </p:sp>
+      <p:sp>
+        <p:nvSpPr>
+          <p:cNvPr id="50" name="Shape 0"/>
+          <p:cNvSpPr/>
+          <p:nvPr/>
+        </p:nvSpPr>
+        <p:spPr>
+          <a:xfrm>
+            <a:off x="0" y="0"/>
+            <a:ext cx="164592" cy="5143500"/>
+          </a:xfrm>
+          <a:prstGeom prst="rect">
+            <a:avLst/>
+          </a:prstGeom>
+          <a:solidFill>
+            <a:srgbClr val="00B4D8"/>
+          </a:solidFill>
+          <a:ln w="12700">
+            <a:solidFill>
+              <a:srgbClr val="00B4D8"/>
+            </a:solidFill>
+            <a:prstDash val="solid"/>
+          </a:ln>
+        </p:spPr>
+      </p:sp>
     </p:spTree>
   </p:cSld>
   <p:clrMapOvr>
@@ -22661,6 +22971,31 @@
           </a:p>
         </p:txBody>
       </p:sp>
+      <p:sp>
+        <p:nvSpPr>
+          <p:cNvPr id="50" name="Shape 0"/>
+          <p:cNvSpPr/>
+          <p:nvPr/>
+        </p:nvSpPr>
+        <p:spPr>
+          <a:xfrm>
+            <a:off x="0" y="0"/>
+            <a:ext cx="164592" cy="5143500"/>
+          </a:xfrm>
+          <a:prstGeom prst="rect">
+            <a:avLst/>
+          </a:prstGeom>
+          <a:solidFill>
+            <a:srgbClr val="00B4D8"/>
+          </a:solidFill>
+          <a:ln w="12700">
+            <a:solidFill>
+              <a:srgbClr val="00B4D8"/>
+            </a:solidFill>
+            <a:prstDash val="solid"/>
+          </a:ln>
+        </p:spPr>
+      </p:sp>
     </p:spTree>
   </p:cSld>
   <p:clrMapOvr>
@@ -23973,7 +24308,7 @@
         </p:nvSpPr>
         <p:spPr>
           <a:xfrm>
-            <a:off x="4434840" y="1664208"/>
+            <a:off x="4434840" y="1676908"/>
             <a:ext cx="274320" cy="109728"/>
           </a:xfrm>
           <a:prstGeom prst="rect">
@@ -23998,7 +24333,7 @@
         </p:nvSpPr>
         <p:spPr>
           <a:xfrm>
-            <a:off x="4434840" y="2551176"/>
+            <a:off x="4434840" y="2563876"/>
             <a:ext cx="274320" cy="109728"/>
           </a:xfrm>
           <a:prstGeom prst="rect">
@@ -24227,6 +24562,31 @@
           </a:effectLst>
         </p:spPr>
       </p:pic>
+      <p:sp>
+        <p:nvSpPr>
+          <p:cNvPr id="50" name="Shape 0"/>
+          <p:cNvSpPr/>
+          <p:nvPr/>
+        </p:nvSpPr>
+        <p:spPr>
+          <a:xfrm>
+            <a:off x="0" y="6096"/>
+            <a:ext cx="164592" cy="5143500"/>
+          </a:xfrm>
+          <a:prstGeom prst="rect">
+            <a:avLst/>
+          </a:prstGeom>
+          <a:solidFill>
+            <a:srgbClr val="00B4D8"/>
+          </a:solidFill>
+          <a:ln w="12700">
+            <a:solidFill>
+              <a:srgbClr val="00B4D8"/>
+            </a:solidFill>
+            <a:prstDash val="solid"/>
+          </a:ln>
+        </p:spPr>
+      </p:sp>
     </p:spTree>
   </p:cSld>
   <p:clrMapOvr>
@@ -24416,7 +24776,29 @@
                 <a:ea typeface="Calibri" pitchFamily="34" charset="-122"/>
                 <a:cs typeface="Calibri" pitchFamily="34" charset="-120"/>
               </a:rPr>
-              <a:t>Microsoft SQL Server  •  Version 12.0.2269.0  •  5 Core Entities  •  Django ORM Integration</a:t>
+              <a:t>Microsoft SQL Server  •  Version 12.0.2269.0  •  </a:t>
+            </a:r>
+            <a:r>
+              <a:rPr lang="en-US" sz="1100" dirty="0" smtClean="0">
+                <a:solidFill>
+                  <a:srgbClr val="FFFFFF"/>
+                </a:solidFill>
+                <a:latin typeface="Calibri" pitchFamily="34" charset="0"/>
+                <a:ea typeface="Calibri" pitchFamily="34" charset="-122"/>
+                <a:cs typeface="Calibri" pitchFamily="34" charset="-120"/>
+              </a:rPr>
+              <a:t>4 </a:t>
+            </a:r>
+            <a:r>
+              <a:rPr lang="en-US" sz="1100" dirty="0">
+                <a:solidFill>
+                  <a:srgbClr val="FFFFFF"/>
+                </a:solidFill>
+                <a:latin typeface="Calibri" pitchFamily="34" charset="0"/>
+                <a:ea typeface="Calibri" pitchFamily="34" charset="-122"/>
+                <a:cs typeface="Calibri" pitchFamily="34" charset="-120"/>
+              </a:rPr>
+              <a:t>Core Entities  •  Django ORM Integration</a:t>
             </a:r>
             <a:endParaRPr lang="en-US" sz="1100" dirty="0"/>
           </a:p>
@@ -24504,7 +24886,7 @@
               <a:buNone/>
             </a:pPr>
             <a:r>
-              <a:rPr lang="en-US" sz="1100" b="1" dirty="0">
+              <a:rPr lang="en-US" sz="1100" b="1" dirty="0" err="1" smtClean="0">
                 <a:solidFill>
                   <a:srgbClr val="FFFFFF"/>
                 </a:solidFill>
@@ -24513,6 +24895,17 @@
                 <a:cs typeface="Calibri" pitchFamily="34" charset="-120"/>
               </a:rPr>
               <a:t>auth_user</a:t>
+            </a:r>
+            <a:r>
+              <a:rPr lang="en-US" sz="1100" b="1" dirty="0" smtClean="0">
+                <a:solidFill>
+                  <a:srgbClr val="FFFFFF"/>
+                </a:solidFill>
+                <a:latin typeface="Calibri" pitchFamily="34" charset="0"/>
+                <a:ea typeface="Calibri" pitchFamily="34" charset="-122"/>
+                <a:cs typeface="Calibri" pitchFamily="34" charset="-120"/>
+              </a:rPr>
+              <a:t>(Admin)</a:t>
             </a:r>
             <a:endParaRPr lang="en-US" sz="1100" dirty="0"/>
           </a:p>
@@ -24803,7 +25196,18 @@
                 <a:ea typeface="Calibri" pitchFamily="34" charset="-122"/>
                 <a:cs typeface="Calibri" pitchFamily="34" charset="-120"/>
               </a:rPr>
-              <a:t>▸  user (FK→auth_user)</a:t>
+              <a:t>▸  </a:t>
+            </a:r>
+            <a:r>
+              <a:rPr lang="en-US" sz="900" dirty="0" err="1" smtClean="0">
+                <a:solidFill>
+                  <a:srgbClr val="E8F4FD"/>
+                </a:solidFill>
+                <a:latin typeface="Calibri" pitchFamily="34" charset="0"/>
+                <a:ea typeface="Calibri" pitchFamily="34" charset="-122"/>
+                <a:cs typeface="Calibri" pitchFamily="34" charset="-120"/>
+              </a:rPr>
+              <a:t>sh_username</a:t>
             </a:r>
             <a:endParaRPr lang="en-US" sz="900" dirty="0"/>
           </a:p>
@@ -25055,7 +25459,18 @@
                 <a:ea typeface="Calibri" pitchFamily="34" charset="-122"/>
                 <a:cs typeface="Calibri" pitchFamily="34" charset="-120"/>
               </a:rPr>
-              <a:t>▸  user (FK→auth_user)</a:t>
+              <a:t>▸  </a:t>
+            </a:r>
+            <a:r>
+              <a:rPr lang="en-US" sz="900" dirty="0" err="1" smtClean="0">
+                <a:solidFill>
+                  <a:srgbClr val="E8F4FD"/>
+                </a:solidFill>
+                <a:latin typeface="Calibri" pitchFamily="34" charset="0"/>
+                <a:ea typeface="Calibri" pitchFamily="34" charset="-122"/>
+                <a:cs typeface="Calibri" pitchFamily="34" charset="-120"/>
+              </a:rPr>
+              <a:t>c_username</a:t>
             </a:r>
             <a:endParaRPr lang="en-US" sz="900" dirty="0"/>
           </a:p>
@@ -25172,7 +25587,18 @@
                 <a:ea typeface="Calibri" pitchFamily="34" charset="-122"/>
                 <a:cs typeface="Calibri" pitchFamily="34" charset="-120"/>
               </a:rPr>
-              <a:t>▸  website</a:t>
+              <a:t>▸  </a:t>
+            </a:r>
+            <a:r>
+              <a:rPr lang="en-US" sz="900" dirty="0" smtClean="0">
+                <a:solidFill>
+                  <a:srgbClr val="E8F4FD"/>
+                </a:solidFill>
+                <a:latin typeface="Calibri" pitchFamily="34" charset="0"/>
+                <a:ea typeface="Calibri" pitchFamily="34" charset="-122"/>
+                <a:cs typeface="Calibri" pitchFamily="34" charset="-120"/>
+              </a:rPr>
+              <a:t>Government lenses </a:t>
             </a:r>
             <a:endParaRPr lang="en-US" sz="900" dirty="0"/>
           </a:p>
@@ -25774,9 +26200,17 @@
           <a:bodyPr wrap="square" rtlCol="0" anchor="ctr"/>
           <a:lstStyle/>
           <a:p>
-            <a:pPr marL="0" indent="0">
-              <a:buNone/>
-            </a:pPr>
+            <a:r>
+              <a:rPr lang="en-US" sz="900" dirty="0" err="1">
+                <a:solidFill>
+                  <a:srgbClr val="E8F4FD"/>
+                </a:solidFill>
+                <a:latin typeface="Calibri" pitchFamily="34" charset="0"/>
+                <a:ea typeface="Calibri" pitchFamily="34" charset="-122"/>
+                <a:cs typeface="Calibri" pitchFamily="34" charset="-120"/>
+              </a:rPr>
+              <a:t>Company_DB</a:t>
+            </a:r>
             <a:r>
               <a:rPr lang="en-US" sz="900" dirty="0">
                 <a:solidFill>
@@ -25786,11 +26220,102 @@
                 <a:ea typeface="Calibri" pitchFamily="34" charset="-122"/>
                 <a:cs typeface="Calibri" pitchFamily="34" charset="-120"/>
               </a:rPr>
-              <a:t>User ↔ JobSeekerProfile (1:1)  |  User ↔ CompanyProfile (1:1)  |  CompanyProfile → Job (1:N)  |  Job → JobApplication (1:N)  |  JobSeekerProfile → JobApplication (1:N)</a:t>
+              <a:t> → Job (1:N) | Job → </a:t>
+            </a:r>
+            <a:r>
+              <a:rPr lang="en-US" sz="900" dirty="0" err="1">
+                <a:solidFill>
+                  <a:srgbClr val="E8F4FD"/>
+                </a:solidFill>
+                <a:latin typeface="Calibri" pitchFamily="34" charset="0"/>
+                <a:ea typeface="Calibri" pitchFamily="34" charset="-122"/>
+                <a:cs typeface="Calibri" pitchFamily="34" charset="-120"/>
+              </a:rPr>
+              <a:t>Application_DB</a:t>
+            </a:r>
+            <a:r>
+              <a:rPr lang="en-US" sz="900" dirty="0">
+                <a:solidFill>
+                  <a:srgbClr val="E8F4FD"/>
+                </a:solidFill>
+                <a:latin typeface="Calibri" pitchFamily="34" charset="0"/>
+                <a:ea typeface="Calibri" pitchFamily="34" charset="-122"/>
+                <a:cs typeface="Calibri" pitchFamily="34" charset="-120"/>
+              </a:rPr>
+              <a:t> (1:N) | </a:t>
+            </a:r>
+            <a:r>
+              <a:rPr lang="en-US" sz="900" dirty="0" err="1">
+                <a:solidFill>
+                  <a:srgbClr val="E8F4FD"/>
+                </a:solidFill>
+                <a:latin typeface="Calibri" pitchFamily="34" charset="0"/>
+                <a:ea typeface="Calibri" pitchFamily="34" charset="-122"/>
+                <a:cs typeface="Calibri" pitchFamily="34" charset="-120"/>
+              </a:rPr>
+              <a:t>shaqod_DB</a:t>
+            </a:r>
+            <a:r>
+              <a:rPr lang="en-US" sz="900" dirty="0">
+                <a:solidFill>
+                  <a:srgbClr val="E8F4FD"/>
+                </a:solidFill>
+                <a:latin typeface="Calibri" pitchFamily="34" charset="0"/>
+                <a:ea typeface="Calibri" pitchFamily="34" charset="-122"/>
+                <a:cs typeface="Calibri" pitchFamily="34" charset="-120"/>
+              </a:rPr>
+              <a:t> → </a:t>
+            </a:r>
+            <a:r>
+              <a:rPr lang="en-US" sz="900" dirty="0" err="1">
+                <a:solidFill>
+                  <a:srgbClr val="E8F4FD"/>
+                </a:solidFill>
+                <a:latin typeface="Calibri" pitchFamily="34" charset="0"/>
+                <a:ea typeface="Calibri" pitchFamily="34" charset="-122"/>
+                <a:cs typeface="Calibri" pitchFamily="34" charset="-120"/>
+              </a:rPr>
+              <a:t>Application_DB</a:t>
+            </a:r>
+            <a:r>
+              <a:rPr lang="en-US" sz="900" dirty="0">
+                <a:solidFill>
+                  <a:srgbClr val="E8F4FD"/>
+                </a:solidFill>
+                <a:latin typeface="Calibri" pitchFamily="34" charset="0"/>
+                <a:ea typeface="Calibri" pitchFamily="34" charset="-122"/>
+                <a:cs typeface="Calibri" pitchFamily="34" charset="-120"/>
+              </a:rPr>
+              <a:t> (1:N)</a:t>
             </a:r>
             <a:endParaRPr lang="en-US" sz="900" dirty="0"/>
           </a:p>
         </p:txBody>
+      </p:sp>
+      <p:sp>
+        <p:nvSpPr>
+          <p:cNvPr id="45" name="Shape 0"/>
+          <p:cNvSpPr/>
+          <p:nvPr/>
+        </p:nvSpPr>
+        <p:spPr>
+          <a:xfrm>
+            <a:off x="0" y="0"/>
+            <a:ext cx="164592" cy="5143500"/>
+          </a:xfrm>
+          <a:prstGeom prst="rect">
+            <a:avLst/>
+          </a:prstGeom>
+          <a:solidFill>
+            <a:srgbClr val="00B4D8"/>
+          </a:solidFill>
+          <a:ln w="12700">
+            <a:solidFill>
+              <a:srgbClr val="00B4D8"/>
+            </a:solidFill>
+            <a:prstDash val="solid"/>
+          </a:ln>
+        </p:spPr>
       </p:sp>
     </p:spTree>
   </p:cSld>
@@ -25970,30 +26495,6 @@
           </a:effectLst>
         </p:spPr>
       </p:sp>
-      <p:pic>
-        <p:nvPicPr>
-          <p:cNvPr id="6" name="Image 0" descr="preencoded.png"/>
-          <p:cNvPicPr>
-            <a:picLocks noChangeAspect="1"/>
-          </p:cNvPicPr>
-          <p:nvPr/>
-        </p:nvPicPr>
-        <p:blipFill>
-          <a:blip r:embed="rId3"/>
-          <a:stretch>
-            <a:fillRect/>
-          </a:stretch>
-        </p:blipFill>
-        <p:spPr>
-          <a:xfrm>
-            <a:off x="411480" y="1389888"/>
-            <a:ext cx="384048" cy="384048"/>
-          </a:xfrm>
-          <a:prstGeom prst="rect">
-            <a:avLst/>
-          </a:prstGeom>
-        </p:spPr>
-      </p:pic>
       <p:sp>
         <p:nvSpPr>
           <p:cNvPr id="7" name="Text 4"/>
@@ -26113,7 +26614,7 @@
           <p:nvPr/>
         </p:nvPicPr>
         <p:blipFill>
-          <a:blip r:embed="rId4"/>
+          <a:blip r:embed="rId3"/>
           <a:stretch>
             <a:fillRect/>
           </a:stretch>
@@ -26286,7 +26787,7 @@
           <p:nvPr/>
         </p:nvPicPr>
         <p:blipFill>
-          <a:blip r:embed="rId5"/>
+          <a:blip r:embed="rId4"/>
           <a:stretch>
             <a:fillRect/>
           </a:stretch>
@@ -26411,30 +26912,6 @@
           </a:effectLst>
         </p:spPr>
       </p:sp>
-      <p:pic>
-        <p:nvPicPr>
-          <p:cNvPr id="19" name="Image 3" descr="preencoded.png"/>
-          <p:cNvPicPr>
-            <a:picLocks noChangeAspect="1"/>
-          </p:cNvPicPr>
-          <p:nvPr/>
-        </p:nvPicPr>
-        <p:blipFill>
-          <a:blip r:embed="rId6"/>
-          <a:stretch>
-            <a:fillRect/>
-          </a:stretch>
-        </p:blipFill>
-        <p:spPr>
-          <a:xfrm>
-            <a:off x="2834640" y="2167128"/>
-            <a:ext cx="384048" cy="384048"/>
-          </a:xfrm>
-          <a:prstGeom prst="rect">
-            <a:avLst/>
-          </a:prstGeom>
-        </p:spPr>
-      </p:pic>
       <p:sp>
         <p:nvSpPr>
           <p:cNvPr id="20" name="Text 14"/>
@@ -26545,30 +27022,6 @@
           </a:effectLst>
         </p:spPr>
       </p:sp>
-      <p:pic>
-        <p:nvPicPr>
-          <p:cNvPr id="23" name="Image 4" descr="preencoded.png"/>
-          <p:cNvPicPr>
-            <a:picLocks noChangeAspect="1"/>
-          </p:cNvPicPr>
-          <p:nvPr/>
-        </p:nvPicPr>
-        <p:blipFill>
-          <a:blip r:embed="rId3"/>
-          <a:stretch>
-            <a:fillRect/>
-          </a:stretch>
-        </p:blipFill>
-        <p:spPr>
-          <a:xfrm>
-            <a:off x="2834640" y="2944368"/>
-            <a:ext cx="384048" cy="384048"/>
-          </a:xfrm>
-          <a:prstGeom prst="rect">
-            <a:avLst/>
-          </a:prstGeom>
-        </p:spPr>
-      </p:pic>
       <p:sp>
         <p:nvSpPr>
           <p:cNvPr id="24" name="Text 17"/>
@@ -26727,7 +27180,7 @@
           <p:nvPr/>
         </p:nvPicPr>
         <p:blipFill>
-          <a:blip r:embed="rId7"/>
+          <a:blip r:embed="rId5"/>
           <a:stretch>
             <a:fillRect/>
           </a:stretch>
@@ -26852,30 +27305,6 @@
           </a:effectLst>
         </p:spPr>
       </p:sp>
-      <p:pic>
-        <p:nvPicPr>
-          <p:cNvPr id="36" name="Image 7" descr="preencoded.png"/>
-          <p:cNvPicPr>
-            <a:picLocks noChangeAspect="1"/>
-          </p:cNvPicPr>
-          <p:nvPr/>
-        </p:nvPicPr>
-        <p:blipFill>
-          <a:blip r:embed="rId3"/>
-          <a:stretch>
-            <a:fillRect/>
-          </a:stretch>
-        </p:blipFill>
-        <p:spPr>
-          <a:xfrm>
-            <a:off x="5257800" y="2157984"/>
-            <a:ext cx="384048" cy="384048"/>
-          </a:xfrm>
-          <a:prstGeom prst="rect">
-            <a:avLst/>
-          </a:prstGeom>
-        </p:spPr>
-      </p:pic>
       <p:sp>
         <p:nvSpPr>
           <p:cNvPr id="37" name="Text 27"/>
@@ -26986,108 +27415,259 @@
           </a:effectLst>
         </p:spPr>
       </p:sp>
+      <p:sp>
+        <p:nvSpPr>
+          <p:cNvPr id="41" name="Text 30"/>
+          <p:cNvSpPr/>
+          <p:nvPr/>
+        </p:nvSpPr>
+        <p:spPr>
+          <a:xfrm>
+            <a:off x="5733288" y="2898648"/>
+            <a:ext cx="1691640" cy="310896"/>
+          </a:xfrm>
+          <a:prstGeom prst="rect">
+            <a:avLst/>
+          </a:prstGeom>
+          <a:noFill/>
+          <a:ln/>
+        </p:spPr>
+        <p:txBody>
+          <a:bodyPr wrap="square" rtlCol="0" anchor="ctr"/>
+          <a:lstStyle/>
+          <a:p>
+            <a:pPr marL="0" indent="0">
+              <a:buNone/>
+            </a:pPr>
+            <a:r>
+              <a:rPr lang="en-US" sz="1050" b="1" dirty="0">
+                <a:solidFill>
+                  <a:srgbClr val="FFFFFF"/>
+                </a:solidFill>
+                <a:latin typeface="Calibri" pitchFamily="34" charset="0"/>
+                <a:ea typeface="Calibri" pitchFamily="34" charset="-122"/>
+                <a:cs typeface="Calibri" pitchFamily="34" charset="-120"/>
+              </a:rPr>
+              <a:t>VS Code 1.85</a:t>
+            </a:r>
+            <a:endParaRPr lang="en-US" sz="1050" dirty="0"/>
+          </a:p>
+        </p:txBody>
+      </p:sp>
+      <p:sp>
+        <p:nvSpPr>
+          <p:cNvPr id="42" name="Text 31"/>
+          <p:cNvSpPr/>
+          <p:nvPr/>
+        </p:nvSpPr>
+        <p:spPr>
+          <a:xfrm>
+            <a:off x="5733288" y="3191256"/>
+            <a:ext cx="1691640" cy="256032"/>
+          </a:xfrm>
+          <a:prstGeom prst="rect">
+            <a:avLst/>
+          </a:prstGeom>
+          <a:noFill/>
+          <a:ln/>
+        </p:spPr>
+        <p:txBody>
+          <a:bodyPr wrap="square" rtlCol="0" anchor="ctr"/>
+          <a:lstStyle/>
+          <a:p>
+            <a:pPr marL="0" indent="0">
+              <a:buNone/>
+            </a:pPr>
+            <a:r>
+              <a:rPr lang="en-US" sz="900" dirty="0">
+                <a:solidFill>
+                  <a:srgbClr val="B0C4DE"/>
+                </a:solidFill>
+                <a:latin typeface="Calibri" pitchFamily="34" charset="0"/>
+                <a:ea typeface="Calibri" pitchFamily="34" charset="-122"/>
+                <a:cs typeface="Calibri" pitchFamily="34" charset="-120"/>
+              </a:rPr>
+              <a:t>Code Editor</a:t>
+            </a:r>
+            <a:endParaRPr lang="en-US" sz="900" dirty="0"/>
+          </a:p>
+        </p:txBody>
+      </p:sp>
+      <p:sp>
+        <p:nvSpPr>
+          <p:cNvPr id="47" name="Shape 0"/>
+          <p:cNvSpPr/>
+          <p:nvPr/>
+        </p:nvSpPr>
+        <p:spPr>
+          <a:xfrm>
+            <a:off x="0" y="0"/>
+            <a:ext cx="164592" cy="5143500"/>
+          </a:xfrm>
+          <a:prstGeom prst="rect">
+            <a:avLst/>
+          </a:prstGeom>
+          <a:solidFill>
+            <a:srgbClr val="00B4D8"/>
+          </a:solidFill>
+          <a:ln w="12700">
+            <a:solidFill>
+              <a:srgbClr val="00B4D8"/>
+            </a:solidFill>
+            <a:prstDash val="solid"/>
+          </a:ln>
+        </p:spPr>
+      </p:sp>
       <p:pic>
         <p:nvPicPr>
-          <p:cNvPr id="40" name="Image 8" descr="preencoded.png"/>
+          <p:cNvPr id="32" name="Picture 31"/>
           <p:cNvPicPr>
             <a:picLocks noChangeAspect="1"/>
           </p:cNvPicPr>
           <p:nvPr/>
         </p:nvPicPr>
         <p:blipFill>
-          <a:blip r:embed="rId5"/>
+          <a:blip r:embed="rId6">
+            <a:extLst>
+              <a:ext uri="{28A0092B-C50C-407E-A947-70E740481C1C}">
+                <a14:useLocalDpi xmlns:a14="http://schemas.microsoft.com/office/drawing/2010/main" val="0"/>
+              </a:ext>
+            </a:extLst>
+          </a:blip>
           <a:stretch>
             <a:fillRect/>
           </a:stretch>
         </p:blipFill>
         <p:spPr>
           <a:xfrm>
-            <a:off x="5257800" y="2935224"/>
-            <a:ext cx="384048" cy="384048"/>
+            <a:off x="5246561" y="2944368"/>
+            <a:ext cx="449199" cy="449199"/>
           </a:xfrm>
           <a:prstGeom prst="rect">
             <a:avLst/>
           </a:prstGeom>
         </p:spPr>
       </p:pic>
-      <p:sp>
-        <p:nvSpPr>
-          <p:cNvPr id="41" name="Text 30"/>
-          <p:cNvSpPr/>
-          <p:nvPr/>
-        </p:nvSpPr>
-        <p:spPr>
-          <a:xfrm>
-            <a:off x="5733288" y="2898648"/>
-            <a:ext cx="1691640" cy="310896"/>
-          </a:xfrm>
-          <a:prstGeom prst="rect">
-            <a:avLst/>
-          </a:prstGeom>
-          <a:noFill/>
-          <a:ln/>
-        </p:spPr>
-        <p:txBody>
-          <a:bodyPr wrap="square" rtlCol="0" anchor="ctr"/>
-          <a:lstStyle/>
-          <a:p>
-            <a:pPr marL="0" indent="0">
-              <a:buNone/>
-            </a:pPr>
-            <a:r>
-              <a:rPr lang="en-US" sz="1050" b="1" dirty="0">
-                <a:solidFill>
-                  <a:srgbClr val="FFFFFF"/>
-                </a:solidFill>
-                <a:latin typeface="Calibri" pitchFamily="34" charset="0"/>
-                <a:ea typeface="Calibri" pitchFamily="34" charset="-122"/>
-                <a:cs typeface="Calibri" pitchFamily="34" charset="-120"/>
-              </a:rPr>
-              <a:t>VS Code 1.85</a:t>
-            </a:r>
-            <a:endParaRPr lang="en-US" sz="1050" dirty="0"/>
-          </a:p>
-        </p:txBody>
-      </p:sp>
-      <p:sp>
-        <p:nvSpPr>
-          <p:cNvPr id="42" name="Text 31"/>
-          <p:cNvSpPr/>
-          <p:nvPr/>
-        </p:nvSpPr>
-        <p:spPr>
-          <a:xfrm>
-            <a:off x="5733288" y="3191256"/>
-            <a:ext cx="1691640" cy="256032"/>
-          </a:xfrm>
-          <a:prstGeom prst="rect">
-            <a:avLst/>
-          </a:prstGeom>
-          <a:noFill/>
-          <a:ln/>
-        </p:spPr>
-        <p:txBody>
-          <a:bodyPr wrap="square" rtlCol="0" anchor="ctr"/>
-          <a:lstStyle/>
-          <a:p>
-            <a:pPr marL="0" indent="0">
-              <a:buNone/>
-            </a:pPr>
-            <a:r>
-              <a:rPr lang="en-US" sz="900" dirty="0">
-                <a:solidFill>
-                  <a:srgbClr val="B0C4DE"/>
-                </a:solidFill>
-                <a:latin typeface="Calibri" pitchFamily="34" charset="0"/>
-                <a:ea typeface="Calibri" pitchFamily="34" charset="-122"/>
-                <a:cs typeface="Calibri" pitchFamily="34" charset="-120"/>
-              </a:rPr>
-              <a:t>Code Editor</a:t>
-            </a:r>
-            <a:endParaRPr lang="en-US" sz="900" dirty="0"/>
-          </a:p>
-        </p:txBody>
-      </p:sp>
+      <p:pic>
+        <p:nvPicPr>
+          <p:cNvPr id="33" name="Picture 32"/>
+          <p:cNvPicPr>
+            <a:picLocks noChangeAspect="1"/>
+          </p:cNvPicPr>
+          <p:nvPr/>
+        </p:nvPicPr>
+        <p:blipFill>
+          <a:blip r:embed="rId7">
+            <a:extLst>
+              <a:ext uri="{28A0092B-C50C-407E-A947-70E740481C1C}">
+                <a14:useLocalDpi xmlns:a14="http://schemas.microsoft.com/office/drawing/2010/main" val="0"/>
+              </a:ext>
+            </a:extLst>
+          </a:blip>
+          <a:stretch>
+            <a:fillRect/>
+          </a:stretch>
+        </p:blipFill>
+        <p:spPr>
+          <a:xfrm>
+            <a:off x="5179000" y="1751076"/>
+            <a:ext cx="1726064" cy="1293876"/>
+          </a:xfrm>
+          <a:prstGeom prst="rect">
+            <a:avLst/>
+          </a:prstGeom>
+        </p:spPr>
+      </p:pic>
+      <p:pic>
+        <p:nvPicPr>
+          <p:cNvPr id="43" name="Picture 42"/>
+          <p:cNvPicPr>
+            <a:picLocks noChangeAspect="1"/>
+          </p:cNvPicPr>
+          <p:nvPr/>
+        </p:nvPicPr>
+        <p:blipFill>
+          <a:blip r:embed="rId8">
+            <a:extLst>
+              <a:ext uri="{28A0092B-C50C-407E-A947-70E740481C1C}">
+                <a14:useLocalDpi xmlns:a14="http://schemas.microsoft.com/office/drawing/2010/main" val="0"/>
+              </a:ext>
+            </a:extLst>
+          </a:blip>
+          <a:stretch>
+            <a:fillRect/>
+          </a:stretch>
+        </p:blipFill>
+        <p:spPr>
+          <a:xfrm>
+            <a:off x="2717112" y="2871216"/>
+            <a:ext cx="694944" cy="694944"/>
+          </a:xfrm>
+          <a:prstGeom prst="rect">
+            <a:avLst/>
+          </a:prstGeom>
+        </p:spPr>
+      </p:pic>
+      <p:pic>
+        <p:nvPicPr>
+          <p:cNvPr id="45" name="Picture 44"/>
+          <p:cNvPicPr>
+            <a:picLocks noChangeAspect="1"/>
+          </p:cNvPicPr>
+          <p:nvPr/>
+        </p:nvPicPr>
+        <p:blipFill>
+          <a:blip r:embed="rId9">
+            <a:extLst>
+              <a:ext uri="{28A0092B-C50C-407E-A947-70E740481C1C}">
+                <a14:useLocalDpi xmlns:a14="http://schemas.microsoft.com/office/drawing/2010/main" val="0"/>
+              </a:ext>
+            </a:extLst>
+          </a:blip>
+          <a:stretch>
+            <a:fillRect/>
+          </a:stretch>
+        </p:blipFill>
+        <p:spPr>
+          <a:xfrm>
+            <a:off x="2717112" y="2112264"/>
+            <a:ext cx="676075" cy="567797"/>
+          </a:xfrm>
+          <a:prstGeom prst="rect">
+            <a:avLst/>
+          </a:prstGeom>
+        </p:spPr>
+      </p:pic>
+      <p:pic>
+        <p:nvPicPr>
+          <p:cNvPr id="48" name="Picture 47"/>
+          <p:cNvPicPr>
+            <a:picLocks noChangeAspect="1"/>
+          </p:cNvPicPr>
+          <p:nvPr/>
+        </p:nvPicPr>
+        <p:blipFill>
+          <a:blip r:embed="rId10">
+            <a:extLst>
+              <a:ext uri="{28A0092B-C50C-407E-A947-70E740481C1C}">
+                <a14:useLocalDpi xmlns:a14="http://schemas.microsoft.com/office/drawing/2010/main" val="0"/>
+              </a:ext>
+            </a:extLst>
+          </a:blip>
+          <a:stretch>
+            <a:fillRect/>
+          </a:stretch>
+        </p:blipFill>
+        <p:spPr>
+          <a:xfrm>
+            <a:off x="320040" y="1347787"/>
+            <a:ext cx="614553" cy="614553"/>
+          </a:xfrm>
+          <a:prstGeom prst="rect">
+            <a:avLst/>
+          </a:prstGeom>
+        </p:spPr>
+      </p:pic>
     </p:spTree>
   </p:cSld>
   <p:clrMapOvr>
@@ -28755,6 +29335,31 @@
             <a:endParaRPr lang="en-US" sz="880" dirty="0"/>
           </a:p>
         </p:txBody>
+      </p:sp>
+      <p:sp>
+        <p:nvSpPr>
+          <p:cNvPr id="46" name="Shape 0"/>
+          <p:cNvSpPr/>
+          <p:nvPr/>
+        </p:nvSpPr>
+        <p:spPr>
+          <a:xfrm>
+            <a:off x="0" y="0"/>
+            <a:ext cx="164592" cy="5143500"/>
+          </a:xfrm>
+          <a:prstGeom prst="rect">
+            <a:avLst/>
+          </a:prstGeom>
+          <a:solidFill>
+            <a:srgbClr val="00B4D8"/>
+          </a:solidFill>
+          <a:ln w="12700">
+            <a:solidFill>
+              <a:srgbClr val="00B4D8"/>
+            </a:solidFill>
+            <a:prstDash val="solid"/>
+          </a:ln>
+        </p:spPr>
       </p:sp>
     </p:spTree>
   </p:cSld>
@@ -29332,8 +29937,14 @@
 
 <file path=ppt/webextensions/taskpanes.xml><?xml version="1.0" encoding="utf-8"?>
 <wetp:taskpanes xmlns:wetp="http://schemas.microsoft.com/office/webextensions/taskpanes/2010/11">
+  <wetp:taskpane dockstate="right" visibility="0" width="437" row="4">
+    <wetp:webextensionref xmlns:r="http://schemas.openxmlformats.org/officeDocument/2006/relationships" r:id="rId1"/>
+  </wetp:taskpane>
+  <wetp:taskpane dockstate="right" visibility="0" width="437" row="5">
+    <wetp:webextensionref xmlns:r="http://schemas.openxmlformats.org/officeDocument/2006/relationships" r:id="rId2"/>
+  </wetp:taskpane>
   <wetp:taskpane dockstate="right" visibility="0" width="437" row="6">
-    <wetp:webextensionref xmlns:r="http://schemas.openxmlformats.org/officeDocument/2006/relationships" r:id="rId1"/>
+    <wetp:webextensionref xmlns:r="http://schemas.openxmlformats.org/officeDocument/2006/relationships" r:id="rId3"/>
   </wetp:taskpane>
 </wetp:taskpanes>
 </file>
@@ -29348,4 +29959,28 @@
   <we:bindings/>
   <we:snapshot xmlns:r="http://schemas.openxmlformats.org/officeDocument/2006/relationships"/>
 </we:webextension>
+</file>
+
+<file path=ppt/webextensions/webextension2.xml><?xml version="1.0" encoding="utf-8"?>
+<we:webextension xmlns:we="http://schemas.microsoft.com/office/webextensions/webextension/2010/11" id="{A8CFACEC-D101-4ACD-AF75-02940A33652A}">
+  <we:reference id="wa104381063" version="1.0.0.1" store="en-US" storeType="OMEX"/>
+  <we:alternateReferences>
+    <we:reference id="WA104381063" version="1.0.0.1" store="WA104381063" storeType="OMEX"/>
+  </we:alternateReferences>
+  <we:properties/>
+  <we:bindings/>
+  <we:snapshot xmlns:r="http://schemas.openxmlformats.org/officeDocument/2006/relationships"/>
+</we:webextension>
+</file>
+
+<file path=ppt/webextensions/webextension3.xml><?xml version="1.0" encoding="utf-8"?>
+<we:webextension xmlns:we="http://schemas.microsoft.com/office/webextensions/webextension/2010/11" id="{346E8300-5AE2-419E-A9D3-7C8A80304B29}">
+  <we:reference id="wa200008583" version="1.0.0.1" store="en-US" storeType="OMEX"/>
+  <we:alternateReferences>
+    <we:reference id="WA200008583" version="1.0.0.1" store="WA200008583" storeType="OMEX"/>
+  </we:alternateReferences>
+  <we:properties/>
+  <we:bindings/>
+  <we:snapshot xmlns:r="http://schemas.openxmlformats.org/officeDocument/2006/relationships"/>
+</we:webextension>
 </file>